--- a/instructor/slides/pptx/lectures/L73.pptx
+++ b/instructor/slides/pptx/lectures/L73.pptx
@@ -4304,8 +4304,8 @@
         </p:nvSpPr>
         <p:spPr>
           <a:xfrm>
-            <a:off x="640080" y="1920240"/>
-            <a:ext cx="10972800" cy="1463040"/>
+            <a:off x="640080" y="1828800"/>
+            <a:ext cx="6675120" cy="1645920"/>
           </a:xfrm>
           <a:prstGeom prst="rect">
             <a:avLst/>
@@ -4319,7 +4319,7 @@
           <a:lstStyle/>
           <a:p>
             <a:r>
-              <a:rPr sz="4400" b="1">
+              <a:rPr sz="4000" b="1">
                 <a:solidFill>
                   <a:srgbClr val="FFFFFF"/>
                 </a:solidFill>
@@ -4338,8 +4338,8 @@
         </p:nvSpPr>
         <p:spPr>
           <a:xfrm>
-            <a:off x="640080" y="3657600"/>
-            <a:ext cx="10789920" cy="1097280"/>
+            <a:off x="640080" y="3794760"/>
+            <a:ext cx="6675120" cy="1097280"/>
           </a:xfrm>
           <a:prstGeom prst="rect">
             <a:avLst/>
@@ -4353,7 +4353,7 @@
           <a:lstStyle/>
           <a:p>
             <a:r>
-              <a:rPr sz="2000" b="0">
+              <a:rPr sz="1800" b="0">
                 <a:solidFill>
                   <a:srgbClr val="B7CBDE"/>
                 </a:solidFill>
@@ -4372,8 +4372,8 @@
         </p:nvSpPr>
         <p:spPr>
           <a:xfrm>
-            <a:off x="640080" y="5029200"/>
-            <a:ext cx="10972800" cy="457200"/>
+            <a:off x="640080" y="5120640"/>
+            <a:ext cx="6766560" cy="457200"/>
           </a:xfrm>
           <a:prstGeom prst="rect">
             <a:avLst/>
@@ -4387,7 +4387,7 @@
           <a:lstStyle/>
           <a:p>
             <a:r>
-              <a:rPr sz="1600" b="0">
+              <a:rPr sz="1500" b="0">
                 <a:solidFill>
                   <a:srgbClr val="3EC6FF"/>
                 </a:solidFill>
@@ -4398,6 +4398,30 @@
           </a:p>
         </p:txBody>
       </p:sp>
+      <p:pic>
+        <p:nvPicPr>
+          <p:cNvPr id="7" name="Picture 6" descr="dw-formats.jpg"/>
+          <p:cNvPicPr>
+            <a:picLocks noChangeAspect="1"/>
+          </p:cNvPicPr>
+          <p:nvPr/>
+        </p:nvPicPr>
+        <p:blipFill>
+          <a:blip r:embed="rId2"/>
+          <a:stretch>
+            <a:fillRect/>
+          </a:stretch>
+        </p:blipFill>
+        <p:spPr>
+          <a:xfrm>
+            <a:off x="7452360" y="1325880"/>
+            <a:ext cx="4160520" cy="4160520"/>
+          </a:xfrm>
+          <a:prstGeom prst="rect">
+            <a:avLst/>
+          </a:prstGeom>
+        </p:spPr>
+      </p:pic>
     </p:spTree>
   </p:cSld>
   <p:clrMapOvr>
@@ -4501,8 +4525,8 @@
         </p:nvSpPr>
         <p:spPr>
           <a:xfrm>
-            <a:off x="640080" y="685800"/>
-            <a:ext cx="10972800" cy="1463040"/>
+            <a:off x="640080" y="658368"/>
+            <a:ext cx="10972800" cy="1645920"/>
           </a:xfrm>
           <a:prstGeom prst="rect">
             <a:avLst/>
@@ -4516,7 +4540,7 @@
           <a:lstStyle/>
           <a:p>
             <a:r>
-              <a:rPr sz="3200" b="1">
+              <a:rPr sz="3000" b="1">
                 <a:solidFill>
                   <a:srgbClr val="FFFFFF"/>
                 </a:solidFill>
@@ -4686,8 +4710,8 @@
         </p:nvSpPr>
         <p:spPr>
           <a:xfrm>
-            <a:off x="640080" y="685800"/>
-            <a:ext cx="10972800" cy="1463040"/>
+            <a:off x="640080" y="658368"/>
+            <a:ext cx="7863840" cy="1645920"/>
           </a:xfrm>
           <a:prstGeom prst="rect">
             <a:avLst/>
@@ -4701,7 +4725,7 @@
           <a:lstStyle/>
           <a:p>
             <a:r>
-              <a:rPr sz="3200" b="1">
+              <a:rPr sz="3000" b="1">
                 <a:solidFill>
                   <a:srgbClr val="FFFFFF"/>
                 </a:solidFill>
@@ -4720,8 +4744,8 @@
         </p:nvSpPr>
         <p:spPr>
           <a:xfrm>
-            <a:off x="777240" y="2286000"/>
-            <a:ext cx="10607040" cy="4754880"/>
+            <a:off x="777240" y="2331720"/>
+            <a:ext cx="7498079" cy="4754880"/>
           </a:xfrm>
           <a:prstGeom prst="rect">
             <a:avLst/>
@@ -4740,7 +4764,7 @@
               </a:spcAft>
             </a:pPr>
             <a:r>
-              <a:rPr sz="2400" b="0">
+              <a:rPr sz="2200" b="0">
                 <a:solidFill>
                   <a:srgbClr val="FFFFFF"/>
                 </a:solidFill>
@@ -4751,6 +4775,30 @@
           </a:p>
         </p:txBody>
       </p:sp>
+      <p:pic>
+        <p:nvPicPr>
+          <p:cNvPr id="6" name="Picture 5" descr="dw-formats.jpg"/>
+          <p:cNvPicPr>
+            <a:picLocks noChangeAspect="1"/>
+          </p:cNvPicPr>
+          <p:nvPr/>
+        </p:nvPicPr>
+        <p:blipFill>
+          <a:blip r:embed="rId2"/>
+          <a:stretch>
+            <a:fillRect/>
+          </a:stretch>
+        </p:blipFill>
+        <p:spPr>
+          <a:xfrm>
+            <a:off x="8732520" y="2057400"/>
+            <a:ext cx="2880360" cy="2880360"/>
+          </a:xfrm>
+          <a:prstGeom prst="rect">
+            <a:avLst/>
+          </a:prstGeom>
+        </p:spPr>
+      </p:pic>
     </p:spTree>
   </p:cSld>
   <p:clrMapOvr>
@@ -4854,8 +4902,8 @@
         </p:nvSpPr>
         <p:spPr>
           <a:xfrm>
-            <a:off x="640080" y="685800"/>
-            <a:ext cx="10972800" cy="1463040"/>
+            <a:off x="640080" y="658368"/>
+            <a:ext cx="7863840" cy="1645920"/>
           </a:xfrm>
           <a:prstGeom prst="rect">
             <a:avLst/>
@@ -4869,7 +4917,7 @@
           <a:lstStyle/>
           <a:p>
             <a:r>
-              <a:rPr sz="3200" b="1">
+              <a:rPr sz="3000" b="1">
                 <a:solidFill>
                   <a:srgbClr val="FFFFFF"/>
                 </a:solidFill>
@@ -4888,8 +4936,8 @@
         </p:nvSpPr>
         <p:spPr>
           <a:xfrm>
-            <a:off x="777240" y="2286000"/>
-            <a:ext cx="10607040" cy="4754880"/>
+            <a:off x="777240" y="2331720"/>
+            <a:ext cx="7498079" cy="4754880"/>
           </a:xfrm>
           <a:prstGeom prst="rect">
             <a:avLst/>
@@ -4908,7 +4956,7 @@
               </a:spcAft>
             </a:pPr>
             <a:r>
-              <a:rPr sz="2400" b="0">
+              <a:rPr sz="2200" b="0">
                 <a:solidFill>
                   <a:srgbClr val="FFFFFF"/>
                 </a:solidFill>
@@ -4919,6 +4967,30 @@
           </a:p>
         </p:txBody>
       </p:sp>
+      <p:pic>
+        <p:nvPicPr>
+          <p:cNvPr id="6" name="Picture 5" descr="dw-formats.jpg"/>
+          <p:cNvPicPr>
+            <a:picLocks noChangeAspect="1"/>
+          </p:cNvPicPr>
+          <p:nvPr/>
+        </p:nvPicPr>
+        <p:blipFill>
+          <a:blip r:embed="rId2"/>
+          <a:stretch>
+            <a:fillRect/>
+          </a:stretch>
+        </p:blipFill>
+        <p:spPr>
+          <a:xfrm>
+            <a:off x="8732520" y="2057400"/>
+            <a:ext cx="2880360" cy="2880360"/>
+          </a:xfrm>
+          <a:prstGeom prst="rect">
+            <a:avLst/>
+          </a:prstGeom>
+        </p:spPr>
+      </p:pic>
     </p:spTree>
   </p:cSld>
   <p:clrMapOvr>
@@ -5022,8 +5094,8 @@
         </p:nvSpPr>
         <p:spPr>
           <a:xfrm>
-            <a:off x="640080" y="685800"/>
-            <a:ext cx="10972800" cy="1463040"/>
+            <a:off x="640080" y="658368"/>
+            <a:ext cx="7863840" cy="1645920"/>
           </a:xfrm>
           <a:prstGeom prst="rect">
             <a:avLst/>
@@ -5037,7 +5109,7 @@
           <a:lstStyle/>
           <a:p>
             <a:r>
-              <a:rPr sz="3200" b="1">
+              <a:rPr sz="3000" b="1">
                 <a:solidFill>
                   <a:srgbClr val="FFFFFF"/>
                 </a:solidFill>
@@ -5056,8 +5128,8 @@
         </p:nvSpPr>
         <p:spPr>
           <a:xfrm>
-            <a:off x="777240" y="2286000"/>
-            <a:ext cx="10607040" cy="4754880"/>
+            <a:off x="777240" y="2331720"/>
+            <a:ext cx="7498079" cy="4754880"/>
           </a:xfrm>
           <a:prstGeom prst="rect">
             <a:avLst/>
@@ -5076,7 +5148,7 @@
               </a:spcAft>
             </a:pPr>
             <a:r>
-              <a:rPr sz="2400" b="0">
+              <a:rPr sz="2200" b="0">
                 <a:solidFill>
                   <a:srgbClr val="FFFFFF"/>
                 </a:solidFill>
@@ -5087,6 +5159,30 @@
           </a:p>
         </p:txBody>
       </p:sp>
+      <p:pic>
+        <p:nvPicPr>
+          <p:cNvPr id="6" name="Picture 5" descr="dw-formats.jpg"/>
+          <p:cNvPicPr>
+            <a:picLocks noChangeAspect="1"/>
+          </p:cNvPicPr>
+          <p:nvPr/>
+        </p:nvPicPr>
+        <p:blipFill>
+          <a:blip r:embed="rId2"/>
+          <a:stretch>
+            <a:fillRect/>
+          </a:stretch>
+        </p:blipFill>
+        <p:spPr>
+          <a:xfrm>
+            <a:off x="8732520" y="2057400"/>
+            <a:ext cx="2880360" cy="2880360"/>
+          </a:xfrm>
+          <a:prstGeom prst="rect">
+            <a:avLst/>
+          </a:prstGeom>
+        </p:spPr>
+      </p:pic>
     </p:spTree>
   </p:cSld>
   <p:clrMapOvr>
@@ -5190,8 +5286,8 @@
         </p:nvSpPr>
         <p:spPr>
           <a:xfrm>
-            <a:off x="640080" y="685800"/>
-            <a:ext cx="10972800" cy="1463040"/>
+            <a:off x="640080" y="658368"/>
+            <a:ext cx="7863840" cy="1645920"/>
           </a:xfrm>
           <a:prstGeom prst="rect">
             <a:avLst/>
@@ -5205,7 +5301,7 @@
           <a:lstStyle/>
           <a:p>
             <a:r>
-              <a:rPr sz="3200" b="1">
+              <a:rPr sz="3000" b="1">
                 <a:solidFill>
                   <a:srgbClr val="FFFFFF"/>
                 </a:solidFill>
@@ -5224,8 +5320,8 @@
         </p:nvSpPr>
         <p:spPr>
           <a:xfrm>
-            <a:off x="777240" y="2286000"/>
-            <a:ext cx="10607040" cy="4754880"/>
+            <a:off x="777240" y="2331720"/>
+            <a:ext cx="7498079" cy="4754880"/>
           </a:xfrm>
           <a:prstGeom prst="rect">
             <a:avLst/>
@@ -5244,7 +5340,7 @@
               </a:spcAft>
             </a:pPr>
             <a:r>
-              <a:rPr sz="2400" b="0">
+              <a:rPr sz="2200" b="0">
                 <a:solidFill>
                   <a:srgbClr val="FFFFFF"/>
                 </a:solidFill>
@@ -5260,7 +5356,7 @@
               </a:spcAft>
             </a:pPr>
             <a:r>
-              <a:rPr sz="2400" b="0">
+              <a:rPr sz="2200" b="0">
                 <a:solidFill>
                   <a:srgbClr val="FFFFFF"/>
                 </a:solidFill>
@@ -5276,7 +5372,7 @@
               </a:spcAft>
             </a:pPr>
             <a:r>
-              <a:rPr sz="2400" b="0">
+              <a:rPr sz="2200" b="0">
                 <a:solidFill>
                   <a:srgbClr val="FFFFFF"/>
                 </a:solidFill>
@@ -5287,6 +5383,30 @@
           </a:p>
         </p:txBody>
       </p:sp>
+      <p:pic>
+        <p:nvPicPr>
+          <p:cNvPr id="6" name="Picture 5" descr="dw-recursion.jpg"/>
+          <p:cNvPicPr>
+            <a:picLocks noChangeAspect="1"/>
+          </p:cNvPicPr>
+          <p:nvPr/>
+        </p:nvPicPr>
+        <p:blipFill>
+          <a:blip r:embed="rId2"/>
+          <a:stretch>
+            <a:fillRect/>
+          </a:stretch>
+        </p:blipFill>
+        <p:spPr>
+          <a:xfrm>
+            <a:off x="8732520" y="2057400"/>
+            <a:ext cx="2880360" cy="2880360"/>
+          </a:xfrm>
+          <a:prstGeom prst="rect">
+            <a:avLst/>
+          </a:prstGeom>
+        </p:spPr>
+      </p:pic>
     </p:spTree>
   </p:cSld>
   <p:clrMapOvr>
@@ -5390,8 +5510,8 @@
         </p:nvSpPr>
         <p:spPr>
           <a:xfrm>
-            <a:off x="640080" y="685800"/>
-            <a:ext cx="10972800" cy="1463040"/>
+            <a:off x="640080" y="658368"/>
+            <a:ext cx="7863840" cy="1645920"/>
           </a:xfrm>
           <a:prstGeom prst="rect">
             <a:avLst/>
@@ -5405,7 +5525,7 @@
           <a:lstStyle/>
           <a:p>
             <a:r>
-              <a:rPr sz="3200" b="1">
+              <a:rPr sz="3000" b="1">
                 <a:solidFill>
                   <a:srgbClr val="FFFFFF"/>
                 </a:solidFill>
@@ -5424,8 +5544,8 @@
         </p:nvSpPr>
         <p:spPr>
           <a:xfrm>
-            <a:off x="777240" y="2286000"/>
-            <a:ext cx="10607040" cy="4754880"/>
+            <a:off x="777240" y="2331720"/>
+            <a:ext cx="7498079" cy="4754880"/>
           </a:xfrm>
           <a:prstGeom prst="rect">
             <a:avLst/>
@@ -5444,7 +5564,7 @@
               </a:spcAft>
             </a:pPr>
             <a:r>
-              <a:rPr sz="2400" b="0">
+              <a:rPr sz="2200" b="0">
                 <a:solidFill>
                   <a:srgbClr val="FFFFFF"/>
                 </a:solidFill>
@@ -5460,7 +5580,7 @@
               </a:spcAft>
             </a:pPr>
             <a:r>
-              <a:rPr sz="2400" b="0">
+              <a:rPr sz="2200" b="0">
                 <a:solidFill>
                   <a:srgbClr val="FFFFFF"/>
                 </a:solidFill>
@@ -5476,7 +5596,7 @@
               </a:spcAft>
             </a:pPr>
             <a:r>
-              <a:rPr sz="2400" b="0">
+              <a:rPr sz="2200" b="0">
                 <a:solidFill>
                   <a:srgbClr val="FFFFFF"/>
                 </a:solidFill>
@@ -5492,7 +5612,7 @@
               </a:spcAft>
             </a:pPr>
             <a:r>
-              <a:rPr sz="2400" b="0">
+              <a:rPr sz="2200" b="0">
                 <a:solidFill>
                   <a:srgbClr val="FFFFFF"/>
                 </a:solidFill>
@@ -5503,6 +5623,30 @@
           </a:p>
         </p:txBody>
       </p:sp>
+      <p:pic>
+        <p:nvPicPr>
+          <p:cNvPr id="6" name="Picture 5" descr="dw-formats.jpg"/>
+          <p:cNvPicPr>
+            <a:picLocks noChangeAspect="1"/>
+          </p:cNvPicPr>
+          <p:nvPr/>
+        </p:nvPicPr>
+        <p:blipFill>
+          <a:blip r:embed="rId2"/>
+          <a:stretch>
+            <a:fillRect/>
+          </a:stretch>
+        </p:blipFill>
+        <p:spPr>
+          <a:xfrm>
+            <a:off x="8732520" y="2057400"/>
+            <a:ext cx="2880360" cy="2880360"/>
+          </a:xfrm>
+          <a:prstGeom prst="rect">
+            <a:avLst/>
+          </a:prstGeom>
+        </p:spPr>
+      </p:pic>
     </p:spTree>
   </p:cSld>
   <p:clrMapOvr>
@@ -5606,8 +5750,8 @@
         </p:nvSpPr>
         <p:spPr>
           <a:xfrm>
-            <a:off x="640080" y="685800"/>
-            <a:ext cx="10972800" cy="1463040"/>
+            <a:off x="640080" y="658368"/>
+            <a:ext cx="7863840" cy="1645920"/>
           </a:xfrm>
           <a:prstGeom prst="rect">
             <a:avLst/>
@@ -5621,7 +5765,7 @@
           <a:lstStyle/>
           <a:p>
             <a:r>
-              <a:rPr sz="3200" b="1">
+              <a:rPr sz="3000" b="1">
                 <a:solidFill>
                   <a:srgbClr val="FFFFFF"/>
                 </a:solidFill>
@@ -5640,8 +5784,8 @@
         </p:nvSpPr>
         <p:spPr>
           <a:xfrm>
-            <a:off x="777240" y="2286000"/>
-            <a:ext cx="10607040" cy="4754880"/>
+            <a:off x="777240" y="2331720"/>
+            <a:ext cx="7498079" cy="4754880"/>
           </a:xfrm>
           <a:prstGeom prst="rect">
             <a:avLst/>
@@ -5660,7 +5804,7 @@
               </a:spcAft>
             </a:pPr>
             <a:r>
-              <a:rPr sz="2400" b="0">
+              <a:rPr sz="2200" b="0">
                 <a:solidFill>
                   <a:srgbClr val="FFFFFF"/>
                 </a:solidFill>
@@ -5676,7 +5820,7 @@
               </a:spcAft>
             </a:pPr>
             <a:r>
-              <a:rPr sz="2400" b="0">
+              <a:rPr sz="2200" b="0">
                 <a:solidFill>
                   <a:srgbClr val="FFFFFF"/>
                 </a:solidFill>
@@ -5692,7 +5836,7 @@
               </a:spcAft>
             </a:pPr>
             <a:r>
-              <a:rPr sz="2400" b="0">
+              <a:rPr sz="2200" b="0">
                 <a:solidFill>
                   <a:srgbClr val="FFFFFF"/>
                 </a:solidFill>
@@ -5703,6 +5847,30 @@
           </a:p>
         </p:txBody>
       </p:sp>
+      <p:pic>
+        <p:nvPicPr>
+          <p:cNvPr id="6" name="Picture 5" descr="dw-recursion.jpg"/>
+          <p:cNvPicPr>
+            <a:picLocks noChangeAspect="1"/>
+          </p:cNvPicPr>
+          <p:nvPr/>
+        </p:nvPicPr>
+        <p:blipFill>
+          <a:blip r:embed="rId2"/>
+          <a:stretch>
+            <a:fillRect/>
+          </a:stretch>
+        </p:blipFill>
+        <p:spPr>
+          <a:xfrm>
+            <a:off x="8732520" y="2057400"/>
+            <a:ext cx="2880360" cy="2880360"/>
+          </a:xfrm>
+          <a:prstGeom prst="rect">
+            <a:avLst/>
+          </a:prstGeom>
+        </p:spPr>
+      </p:pic>
     </p:spTree>
   </p:cSld>
   <p:clrMapOvr>
@@ -5806,8 +5974,8 @@
         </p:nvSpPr>
         <p:spPr>
           <a:xfrm>
-            <a:off x="640080" y="685800"/>
-            <a:ext cx="10972800" cy="1463040"/>
+            <a:off x="640080" y="658368"/>
+            <a:ext cx="7863840" cy="1645920"/>
           </a:xfrm>
           <a:prstGeom prst="rect">
             <a:avLst/>
@@ -5821,7 +5989,7 @@
           <a:lstStyle/>
           <a:p>
             <a:r>
-              <a:rPr sz="3200" b="1">
+              <a:rPr sz="3000" b="1">
                 <a:solidFill>
                   <a:srgbClr val="FFFFFF"/>
                 </a:solidFill>
@@ -5840,8 +6008,8 @@
         </p:nvSpPr>
         <p:spPr>
           <a:xfrm>
-            <a:off x="777240" y="2286000"/>
-            <a:ext cx="10607040" cy="4754880"/>
+            <a:off x="777240" y="2331720"/>
+            <a:ext cx="7498079" cy="4754880"/>
           </a:xfrm>
           <a:prstGeom prst="rect">
             <a:avLst/>
@@ -5860,7 +6028,7 @@
               </a:spcAft>
             </a:pPr>
             <a:r>
-              <a:rPr sz="2400" b="0">
+              <a:rPr sz="2200" b="0">
                 <a:solidFill>
                   <a:srgbClr val="FFFFFF"/>
                 </a:solidFill>
@@ -5876,7 +6044,7 @@
               </a:spcAft>
             </a:pPr>
             <a:r>
-              <a:rPr sz="2400" b="0">
+              <a:rPr sz="2200" b="0">
                 <a:solidFill>
                   <a:srgbClr val="FFFFFF"/>
                 </a:solidFill>
@@ -5887,6 +6055,30 @@
           </a:p>
         </p:txBody>
       </p:sp>
+      <p:pic>
+        <p:nvPicPr>
+          <p:cNvPr id="6" name="Picture 5" descr="dw-formats.jpg"/>
+          <p:cNvPicPr>
+            <a:picLocks noChangeAspect="1"/>
+          </p:cNvPicPr>
+          <p:nvPr/>
+        </p:nvPicPr>
+        <p:blipFill>
+          <a:blip r:embed="rId2"/>
+          <a:stretch>
+            <a:fillRect/>
+          </a:stretch>
+        </p:blipFill>
+        <p:spPr>
+          <a:xfrm>
+            <a:off x="8732520" y="2057400"/>
+            <a:ext cx="2880360" cy="2880360"/>
+          </a:xfrm>
+          <a:prstGeom prst="rect">
+            <a:avLst/>
+          </a:prstGeom>
+        </p:spPr>
+      </p:pic>
     </p:spTree>
   </p:cSld>
   <p:clrMapOvr>
@@ -5990,8 +6182,8 @@
         </p:nvSpPr>
         <p:spPr>
           <a:xfrm>
-            <a:off x="640080" y="685800"/>
-            <a:ext cx="10972800" cy="1463040"/>
+            <a:off x="640080" y="658368"/>
+            <a:ext cx="10972800" cy="1645920"/>
           </a:xfrm>
           <a:prstGeom prst="rect">
             <a:avLst/>
@@ -6005,7 +6197,7 @@
           <a:lstStyle/>
           <a:p>
             <a:r>
-              <a:rPr sz="3200" b="1">
+              <a:rPr sz="3000" b="1">
                 <a:solidFill>
                   <a:srgbClr val="FFFFFF"/>
                 </a:solidFill>
@@ -6175,8 +6367,8 @@
         </p:nvSpPr>
         <p:spPr>
           <a:xfrm>
-            <a:off x="640080" y="685800"/>
-            <a:ext cx="10972800" cy="1463040"/>
+            <a:off x="640080" y="658368"/>
+            <a:ext cx="7863840" cy="1645920"/>
           </a:xfrm>
           <a:prstGeom prst="rect">
             <a:avLst/>
@@ -6190,7 +6382,7 @@
           <a:lstStyle/>
           <a:p>
             <a:r>
-              <a:rPr sz="3200" b="1">
+              <a:rPr sz="3000" b="1">
                 <a:solidFill>
                   <a:srgbClr val="FFFFFF"/>
                 </a:solidFill>
@@ -6209,8 +6401,8 @@
         </p:nvSpPr>
         <p:spPr>
           <a:xfrm>
-            <a:off x="777240" y="2286000"/>
-            <a:ext cx="10607040" cy="4754880"/>
+            <a:off x="777240" y="2331720"/>
+            <a:ext cx="7498079" cy="4754880"/>
           </a:xfrm>
           <a:prstGeom prst="rect">
             <a:avLst/>
@@ -6229,7 +6421,7 @@
               </a:spcAft>
             </a:pPr>
             <a:r>
-              <a:rPr sz="2400" b="0">
+              <a:rPr sz="2200" b="0">
                 <a:solidFill>
                   <a:srgbClr val="FFFFFF"/>
                 </a:solidFill>
@@ -6245,7 +6437,7 @@
               </a:spcAft>
             </a:pPr>
             <a:r>
-              <a:rPr sz="2400" b="0">
+              <a:rPr sz="2200" b="0">
                 <a:solidFill>
                   <a:srgbClr val="FFFFFF"/>
                 </a:solidFill>
@@ -6261,7 +6453,7 @@
               </a:spcAft>
             </a:pPr>
             <a:r>
-              <a:rPr sz="2400" b="0">
+              <a:rPr sz="2200" b="0">
                 <a:solidFill>
                   <a:srgbClr val="FFFFFF"/>
                 </a:solidFill>
@@ -6277,7 +6469,7 @@
               </a:spcAft>
             </a:pPr>
             <a:r>
-              <a:rPr sz="2400" b="0">
+              <a:rPr sz="2200" b="0">
                 <a:solidFill>
                   <a:srgbClr val="FFFFFF"/>
                 </a:solidFill>
@@ -6288,6 +6480,30 @@
           </a:p>
         </p:txBody>
       </p:sp>
+      <p:pic>
+        <p:nvPicPr>
+          <p:cNvPr id="6" name="Picture 5" descr="dw-formats.jpg"/>
+          <p:cNvPicPr>
+            <a:picLocks noChangeAspect="1"/>
+          </p:cNvPicPr>
+          <p:nvPr/>
+        </p:nvPicPr>
+        <p:blipFill>
+          <a:blip r:embed="rId2"/>
+          <a:stretch>
+            <a:fillRect/>
+          </a:stretch>
+        </p:blipFill>
+        <p:spPr>
+          <a:xfrm>
+            <a:off x="8732520" y="2057400"/>
+            <a:ext cx="2880360" cy="2880360"/>
+          </a:xfrm>
+          <a:prstGeom prst="rect">
+            <a:avLst/>
+          </a:prstGeom>
+        </p:spPr>
+      </p:pic>
     </p:spTree>
   </p:cSld>
   <p:clrMapOvr>
@@ -6391,8 +6607,8 @@
         </p:nvSpPr>
         <p:spPr>
           <a:xfrm>
-            <a:off x="640080" y="685800"/>
-            <a:ext cx="10972800" cy="1463040"/>
+            <a:off x="640080" y="658368"/>
+            <a:ext cx="7863840" cy="1645920"/>
           </a:xfrm>
           <a:prstGeom prst="rect">
             <a:avLst/>
@@ -6406,7 +6622,7 @@
           <a:lstStyle/>
           <a:p>
             <a:r>
-              <a:rPr sz="3200" b="1">
+              <a:rPr sz="3000" b="1">
                 <a:solidFill>
                   <a:srgbClr val="FFFFFF"/>
                 </a:solidFill>
@@ -6425,8 +6641,8 @@
         </p:nvSpPr>
         <p:spPr>
           <a:xfrm>
-            <a:off x="777240" y="2286000"/>
-            <a:ext cx="10607040" cy="4754880"/>
+            <a:off x="777240" y="2331720"/>
+            <a:ext cx="7498079" cy="4754880"/>
           </a:xfrm>
           <a:prstGeom prst="rect">
             <a:avLst/>
@@ -6445,7 +6661,7 @@
               </a:spcAft>
             </a:pPr>
             <a:r>
-              <a:rPr sz="2400" b="0">
+              <a:rPr sz="2200" b="0">
                 <a:solidFill>
                   <a:srgbClr val="FFFFFF"/>
                 </a:solidFill>
@@ -6456,6 +6672,30 @@
           </a:p>
         </p:txBody>
       </p:sp>
+      <p:pic>
+        <p:nvPicPr>
+          <p:cNvPr id="6" name="Picture 5" descr="dw-formats.jpg"/>
+          <p:cNvPicPr>
+            <a:picLocks noChangeAspect="1"/>
+          </p:cNvPicPr>
+          <p:nvPr/>
+        </p:nvPicPr>
+        <p:blipFill>
+          <a:blip r:embed="rId2"/>
+          <a:stretch>
+            <a:fillRect/>
+          </a:stretch>
+        </p:blipFill>
+        <p:spPr>
+          <a:xfrm>
+            <a:off x="8732520" y="2057400"/>
+            <a:ext cx="2880360" cy="2880360"/>
+          </a:xfrm>
+          <a:prstGeom prst="rect">
+            <a:avLst/>
+          </a:prstGeom>
+        </p:spPr>
+      </p:pic>
     </p:spTree>
   </p:cSld>
   <p:clrMapOvr>
